--- a/Track Your Expenses.pptx
+++ b/Track Your Expenses.pptx
@@ -2,7 +2,7 @@
 <file path=ppt/presentation.xml><?xml version="1.0" encoding="utf-8"?>
 <p:presentation xmlns:a="http://schemas.openxmlformats.org/drawingml/2006/main" xmlns:r="http://schemas.openxmlformats.org/officeDocument/2006/relationships" xmlns:p="http://schemas.openxmlformats.org/presentationml/2006/main" autoCompressPictures="0">
   <p:sldMasterIdLst>
-    <p:sldMasterId id="2147483648" r:id="rId1"/>
+    <p:sldMasterId id="2147483687" r:id="rId1"/>
   </p:sldMasterIdLst>
   <p:sldIdLst>
     <p:sldId id="256" r:id="rId2"/>
@@ -109,6 +109,11 @@
       </a:defRPr>
     </a:lvl9pPr>
   </p:defaultTextStyle>
+  <p:extLst>
+    <p:ext uri="{EFAFB233-063F-42B5-8137-9DF3F51BA10A}">
+      <p15:sldGuideLst xmlns:p15="http://schemas.microsoft.com/office/powerpoint/2012/main"/>
+    </p:ext>
+  </p:extLst>
 </p:presentation>
 </file>
 
@@ -140,13 +145,6 @@
         <p:blipFill>
           <a:blip r:embed="rId2">
             <a:alphaModFix amt="30000"/>
-            <a:duotone>
-              <a:prstClr val="black"/>
-              <a:schemeClr val="tx2">
-                <a:tint val="45000"/>
-                <a:satMod val="400000"/>
-              </a:schemeClr>
-            </a:duotone>
             <a:extLst>
               <a:ext uri="{28A0092B-C50C-407E-A947-70E740481C1C}">
                 <a14:useLocalDpi xmlns:a14="http://schemas.microsoft.com/office/drawing/2010/main" val="0"/>
@@ -197,8 +195,9 @@
                 <a:schemeClr val="tx2"/>
               </a:gs>
               <a:gs pos="100000">
-                <a:schemeClr val="tx2">
-                  <a:lumMod val="75000"/>
+                <a:schemeClr val="bg2">
+                  <a:lumMod val="60000"/>
+                  <a:lumOff val="40000"/>
                 </a:schemeClr>
               </a:gs>
             </a:gsLst>
@@ -4326,7 +4325,7 @@
               <a:buNone/>
               <a:defRPr sz="2000" cap="all" baseline="0">
                 <a:solidFill>
-                  <a:schemeClr val="accent2"/>
+                  <a:schemeClr val="tx2"/>
                 </a:solidFill>
               </a:defRPr>
             </a:lvl1pPr>
@@ -4393,8 +4392,8 @@
           <a:lstStyle/>
           <a:p>
             <a:fld id="{48A87A34-81AB-432B-8DAE-1953F412C126}" type="datetimeFigureOut">
-              <a:rPr lang="en-US" dirty="0"/>
-              <a:t>8/1/2024</a:t>
+              <a:rPr lang="en-US" smtClean="0"/>
+              <a:t>8/21/2024</a:t>
             </a:fld>
             <a:endParaRPr lang="en-US" dirty="0"/>
           </a:p>
@@ -4445,7 +4444,7 @@
           <a:lstStyle/>
           <a:p>
             <a:fld id="{6D22F896-40B5-4ADD-8801-0D06FADFA095}" type="slidenum">
-              <a:rPr lang="en-US" dirty="0"/>
+              <a:rPr lang="en-US" smtClean="0"/>
               <a:t>‹#›</a:t>
             </a:fld>
             <a:endParaRPr lang="en-US" dirty="0"/>
@@ -4453,17 +4452,22 @@
         </p:txBody>
       </p:sp>
     </p:spTree>
+    <p:extLst>
+      <p:ext uri="{BB962C8B-B14F-4D97-AF65-F5344CB8AC3E}">
+        <p14:creationId xmlns:p14="http://schemas.microsoft.com/office/powerpoint/2010/main" val="4231117161"/>
+      </p:ext>
+    </p:extLst>
   </p:cSld>
   <p:clrMapOvr>
     <a:masterClrMapping/>
   </p:clrMapOvr>
-  <mc:AlternateContent xmlns:mc="http://schemas.openxmlformats.org/markup-compatibility/2006">
-    <mc:Choice xmlns:p14="http://schemas.microsoft.com/office/powerpoint/2010/main" Requires="p14">
+  <mc:AlternateContent xmlns:mc="http://schemas.openxmlformats.org/markup-compatibility/2006" xmlns:p14="http://schemas.microsoft.com/office/powerpoint/2010/main">
+    <mc:Choice Requires="p14">
       <p:transition spd="slow" p14:dur="4000">
         <p14:vortex dir="r"/>
       </p:transition>
     </mc:Choice>
-    <mc:Fallback>
+    <mc:Fallback xmlns="">
       <p:transition spd="slow">
         <p:fade/>
       </p:transition>
@@ -4667,8 +4671,8 @@
           <a:lstStyle/>
           <a:p>
             <a:fld id="{48A87A34-81AB-432B-8DAE-1953F412C126}" type="datetimeFigureOut">
-              <a:rPr lang="en-US" dirty="0"/>
-              <a:t>8/1/2024</a:t>
+              <a:rPr lang="en-US" smtClean="0"/>
+              <a:t>8/21/2024</a:t>
             </a:fld>
             <a:endParaRPr lang="en-US" dirty="0"/>
           </a:p>
@@ -4709,7 +4713,7 @@
           <a:lstStyle/>
           <a:p>
             <a:fld id="{6D22F896-40B5-4ADD-8801-0D06FADFA095}" type="slidenum">
-              <a:rPr lang="en-US" dirty="0"/>
+              <a:rPr lang="en-US" smtClean="0"/>
               <a:t>‹#›</a:t>
             </a:fld>
             <a:endParaRPr lang="en-US" dirty="0"/>
@@ -4717,17 +4721,22 @@
         </p:txBody>
       </p:sp>
     </p:spTree>
+    <p:extLst>
+      <p:ext uri="{BB962C8B-B14F-4D97-AF65-F5344CB8AC3E}">
+        <p14:creationId xmlns:p14="http://schemas.microsoft.com/office/powerpoint/2010/main" val="3217439737"/>
+      </p:ext>
+    </p:extLst>
   </p:cSld>
   <p:clrMapOvr>
     <a:masterClrMapping/>
   </p:clrMapOvr>
-  <mc:AlternateContent xmlns:mc="http://schemas.openxmlformats.org/markup-compatibility/2006">
-    <mc:Choice xmlns:p14="http://schemas.microsoft.com/office/powerpoint/2010/main" Requires="p14">
+  <mc:AlternateContent xmlns:mc="http://schemas.openxmlformats.org/markup-compatibility/2006" xmlns:p14="http://schemas.microsoft.com/office/powerpoint/2010/main">
+    <mc:Choice Requires="p14">
       <p:transition spd="slow" p14:dur="4000">
         <p14:vortex dir="r"/>
       </p:transition>
     </mc:Choice>
-    <mc:Fallback>
+    <mc:Fallback xmlns="">
       <p:transition spd="slow">
         <p:fade/>
       </p:transition>
@@ -4870,8 +4879,8 @@
           <a:lstStyle/>
           <a:p>
             <a:fld id="{48A87A34-81AB-432B-8DAE-1953F412C126}" type="datetimeFigureOut">
-              <a:rPr lang="en-US" dirty="0"/>
-              <a:t>8/1/2024</a:t>
+              <a:rPr lang="en-US" smtClean="0"/>
+              <a:t>8/21/2024</a:t>
             </a:fld>
             <a:endParaRPr lang="en-US" dirty="0"/>
           </a:p>
@@ -4912,7 +4921,7 @@
           <a:lstStyle/>
           <a:p>
             <a:fld id="{6D22F896-40B5-4ADD-8801-0D06FADFA095}" type="slidenum">
-              <a:rPr lang="en-US" dirty="0"/>
+              <a:rPr lang="en-US" smtClean="0"/>
               <a:t>‹#›</a:t>
             </a:fld>
             <a:endParaRPr lang="en-US" dirty="0"/>
@@ -4920,17 +4929,22 @@
         </p:txBody>
       </p:sp>
     </p:spTree>
+    <p:extLst>
+      <p:ext uri="{BB962C8B-B14F-4D97-AF65-F5344CB8AC3E}">
+        <p14:creationId xmlns:p14="http://schemas.microsoft.com/office/powerpoint/2010/main" val="617102645"/>
+      </p:ext>
+    </p:extLst>
   </p:cSld>
   <p:clrMapOvr>
     <a:masterClrMapping/>
   </p:clrMapOvr>
-  <mc:AlternateContent xmlns:mc="http://schemas.openxmlformats.org/markup-compatibility/2006">
-    <mc:Choice xmlns:p14="http://schemas.microsoft.com/office/powerpoint/2010/main" Requires="p14">
+  <mc:AlternateContent xmlns:mc="http://schemas.openxmlformats.org/markup-compatibility/2006" xmlns:p14="http://schemas.microsoft.com/office/powerpoint/2010/main">
+    <mc:Choice Requires="p14">
       <p:transition spd="slow" p14:dur="4000">
         <p14:vortex dir="r"/>
       </p:transition>
     </mc:Choice>
-    <mc:Fallback>
+    <mc:Fallback xmlns="">
       <p:transition spd="slow">
         <p:fade/>
       </p:transition>
@@ -5140,8 +5154,8 @@
           <a:lstStyle/>
           <a:p>
             <a:fld id="{48A87A34-81AB-432B-8DAE-1953F412C126}" type="datetimeFigureOut">
-              <a:rPr lang="en-US" dirty="0"/>
-              <a:t>8/1/2024</a:t>
+              <a:rPr lang="en-US" smtClean="0"/>
+              <a:t>8/21/2024</a:t>
             </a:fld>
             <a:endParaRPr lang="en-US" dirty="0"/>
           </a:p>
@@ -5182,7 +5196,7 @@
           <a:lstStyle/>
           <a:p>
             <a:fld id="{6D22F896-40B5-4ADD-8801-0D06FADFA095}" type="slidenum">
-              <a:rPr lang="en-US" dirty="0"/>
+              <a:rPr lang="en-US" smtClean="0"/>
               <a:t>‹#›</a:t>
             </a:fld>
             <a:endParaRPr lang="en-US" dirty="0"/>
@@ -5428,17 +5442,22 @@
         </p:txBody>
       </p:sp>
     </p:spTree>
+    <p:extLst>
+      <p:ext uri="{BB962C8B-B14F-4D97-AF65-F5344CB8AC3E}">
+        <p14:creationId xmlns:p14="http://schemas.microsoft.com/office/powerpoint/2010/main" val="2103028956"/>
+      </p:ext>
+    </p:extLst>
   </p:cSld>
   <p:clrMapOvr>
     <a:masterClrMapping/>
   </p:clrMapOvr>
-  <mc:AlternateContent xmlns:mc="http://schemas.openxmlformats.org/markup-compatibility/2006">
-    <mc:Choice xmlns:p14="http://schemas.microsoft.com/office/powerpoint/2010/main" Requires="p14">
+  <mc:AlternateContent xmlns:mc="http://schemas.openxmlformats.org/markup-compatibility/2006" xmlns:p14="http://schemas.microsoft.com/office/powerpoint/2010/main">
+    <mc:Choice Requires="p14">
       <p:transition spd="slow" p14:dur="4000">
         <p14:vortex dir="r"/>
       </p:transition>
     </mc:Choice>
-    <mc:Fallback>
+    <mc:Fallback xmlns="">
       <p:transition spd="slow">
         <p:fade/>
       </p:transition>
@@ -5581,8 +5600,8 @@
           <a:lstStyle/>
           <a:p>
             <a:fld id="{48A87A34-81AB-432B-8DAE-1953F412C126}" type="datetimeFigureOut">
-              <a:rPr lang="en-US" dirty="0"/>
-              <a:t>8/1/2024</a:t>
+              <a:rPr lang="en-US" smtClean="0"/>
+              <a:t>8/21/2024</a:t>
             </a:fld>
             <a:endParaRPr lang="en-US" dirty="0"/>
           </a:p>
@@ -5623,7 +5642,7 @@
           <a:lstStyle/>
           <a:p>
             <a:fld id="{6D22F896-40B5-4ADD-8801-0D06FADFA095}" type="slidenum">
-              <a:rPr lang="en-US" dirty="0"/>
+              <a:rPr lang="en-US" smtClean="0"/>
               <a:t>‹#›</a:t>
             </a:fld>
             <a:endParaRPr lang="en-US" dirty="0"/>
@@ -5631,17 +5650,22 @@
         </p:txBody>
       </p:sp>
     </p:spTree>
+    <p:extLst>
+      <p:ext uri="{BB962C8B-B14F-4D97-AF65-F5344CB8AC3E}">
+        <p14:creationId xmlns:p14="http://schemas.microsoft.com/office/powerpoint/2010/main" val="2425213403"/>
+      </p:ext>
+    </p:extLst>
   </p:cSld>
   <p:clrMapOvr>
     <a:masterClrMapping/>
   </p:clrMapOvr>
-  <mc:AlternateContent xmlns:mc="http://schemas.openxmlformats.org/markup-compatibility/2006">
-    <mc:Choice xmlns:p14="http://schemas.microsoft.com/office/powerpoint/2010/main" Requires="p14">
+  <mc:AlternateContent xmlns:mc="http://schemas.openxmlformats.org/markup-compatibility/2006" xmlns:p14="http://schemas.microsoft.com/office/powerpoint/2010/main">
+    <mc:Choice Requires="p14">
       <p:transition spd="slow" p14:dur="4000">
         <p14:vortex dir="r"/>
       </p:transition>
     </mc:Choice>
-    <mc:Fallback>
+    <mc:Fallback xmlns="">
       <p:transition spd="slow">
         <p:fade/>
       </p:transition>
@@ -6134,8 +6158,8 @@
           <a:lstStyle/>
           <a:p>
             <a:fld id="{48A87A34-81AB-432B-8DAE-1953F412C126}" type="datetimeFigureOut">
-              <a:rPr lang="en-US" dirty="0"/>
-              <a:t>8/1/2024</a:t>
+              <a:rPr lang="en-US" smtClean="0"/>
+              <a:t>8/21/2024</a:t>
             </a:fld>
             <a:endParaRPr lang="en-US" dirty="0"/>
           </a:p>
@@ -6176,7 +6200,7 @@
           <a:lstStyle/>
           <a:p>
             <a:fld id="{6D22F896-40B5-4ADD-8801-0D06FADFA095}" type="slidenum">
-              <a:rPr lang="en-US" dirty="0"/>
+              <a:rPr lang="en-US" smtClean="0"/>
               <a:t>‹#›</a:t>
             </a:fld>
             <a:endParaRPr lang="en-US" dirty="0"/>
@@ -6184,17 +6208,22 @@
         </p:txBody>
       </p:sp>
     </p:spTree>
+    <p:extLst>
+      <p:ext uri="{BB962C8B-B14F-4D97-AF65-F5344CB8AC3E}">
+        <p14:creationId xmlns:p14="http://schemas.microsoft.com/office/powerpoint/2010/main" val="3463299931"/>
+      </p:ext>
+    </p:extLst>
   </p:cSld>
   <p:clrMapOvr>
     <a:masterClrMapping/>
   </p:clrMapOvr>
-  <mc:AlternateContent xmlns:mc="http://schemas.openxmlformats.org/markup-compatibility/2006">
-    <mc:Choice xmlns:p14="http://schemas.microsoft.com/office/powerpoint/2010/main" Requires="p14">
+  <mc:AlternateContent xmlns:mc="http://schemas.openxmlformats.org/markup-compatibility/2006" xmlns:p14="http://schemas.microsoft.com/office/powerpoint/2010/main">
+    <mc:Choice Requires="p14">
       <p:transition spd="slow" p14:dur="4000">
         <p14:vortex dir="r"/>
       </p:transition>
     </mc:Choice>
-    <mc:Fallback>
+    <mc:Fallback xmlns="">
       <p:transition spd="slow">
         <p:fade/>
       </p:transition>
@@ -6861,8 +6890,8 @@
           <a:lstStyle/>
           <a:p>
             <a:fld id="{48A87A34-81AB-432B-8DAE-1953F412C126}" type="datetimeFigureOut">
-              <a:rPr lang="en-US" dirty="0"/>
-              <a:t>8/1/2024</a:t>
+              <a:rPr lang="en-US" smtClean="0"/>
+              <a:t>8/21/2024</a:t>
             </a:fld>
             <a:endParaRPr lang="en-US" dirty="0"/>
           </a:p>
@@ -6903,7 +6932,7 @@
           <a:lstStyle/>
           <a:p>
             <a:fld id="{6D22F896-40B5-4ADD-8801-0D06FADFA095}" type="slidenum">
-              <a:rPr lang="en-US" dirty="0"/>
+              <a:rPr lang="en-US" smtClean="0"/>
               <a:t>‹#›</a:t>
             </a:fld>
             <a:endParaRPr lang="en-US" dirty="0"/>
@@ -6911,17 +6940,22 @@
         </p:txBody>
       </p:sp>
     </p:spTree>
+    <p:extLst>
+      <p:ext uri="{BB962C8B-B14F-4D97-AF65-F5344CB8AC3E}">
+        <p14:creationId xmlns:p14="http://schemas.microsoft.com/office/powerpoint/2010/main" val="2410052021"/>
+      </p:ext>
+    </p:extLst>
   </p:cSld>
   <p:clrMapOvr>
     <a:masterClrMapping/>
   </p:clrMapOvr>
-  <mc:AlternateContent xmlns:mc="http://schemas.openxmlformats.org/markup-compatibility/2006">
-    <mc:Choice xmlns:p14="http://schemas.microsoft.com/office/powerpoint/2010/main" Requires="p14">
+  <mc:AlternateContent xmlns:mc="http://schemas.openxmlformats.org/markup-compatibility/2006" xmlns:p14="http://schemas.microsoft.com/office/powerpoint/2010/main">
+    <mc:Choice Requires="p14">
       <p:transition spd="slow" p14:dur="4000">
         <p14:vortex dir="r"/>
       </p:transition>
     </mc:Choice>
-    <mc:Fallback>
+    <mc:Fallback xmlns="">
       <p:transition spd="slow">
         <p:fade/>
       </p:transition>
@@ -7038,8 +7072,8 @@
           <a:lstStyle/>
           <a:p>
             <a:fld id="{48A87A34-81AB-432B-8DAE-1953F412C126}" type="datetimeFigureOut">
-              <a:rPr lang="en-US" dirty="0"/>
-              <a:t>8/1/2024</a:t>
+              <a:rPr lang="en-US" smtClean="0"/>
+              <a:t>8/21/2024</a:t>
             </a:fld>
             <a:endParaRPr lang="en-US" dirty="0"/>
           </a:p>
@@ -7080,7 +7114,7 @@
           <a:lstStyle/>
           <a:p>
             <a:fld id="{6D22F896-40B5-4ADD-8801-0D06FADFA095}" type="slidenum">
-              <a:rPr lang="en-US" dirty="0"/>
+              <a:rPr lang="en-US" smtClean="0"/>
               <a:t>‹#›</a:t>
             </a:fld>
             <a:endParaRPr lang="en-US" dirty="0"/>
@@ -7088,17 +7122,22 @@
         </p:txBody>
       </p:sp>
     </p:spTree>
+    <p:extLst>
+      <p:ext uri="{BB962C8B-B14F-4D97-AF65-F5344CB8AC3E}">
+        <p14:creationId xmlns:p14="http://schemas.microsoft.com/office/powerpoint/2010/main" val="806026290"/>
+      </p:ext>
+    </p:extLst>
   </p:cSld>
   <p:clrMapOvr>
     <a:masterClrMapping/>
   </p:clrMapOvr>
-  <mc:AlternateContent xmlns:mc="http://schemas.openxmlformats.org/markup-compatibility/2006">
-    <mc:Choice xmlns:p14="http://schemas.microsoft.com/office/powerpoint/2010/main" Requires="p14">
+  <mc:AlternateContent xmlns:mc="http://schemas.openxmlformats.org/markup-compatibility/2006" xmlns:p14="http://schemas.microsoft.com/office/powerpoint/2010/main">
+    <mc:Choice Requires="p14">
       <p:transition spd="slow" p14:dur="4000">
         <p14:vortex dir="r"/>
       </p:transition>
     </mc:Choice>
-    <mc:Fallback>
+    <mc:Fallback xmlns="">
       <p:transition spd="slow">
         <p:fade/>
       </p:transition>
@@ -7225,8 +7264,8 @@
           <a:lstStyle/>
           <a:p>
             <a:fld id="{48A87A34-81AB-432B-8DAE-1953F412C126}" type="datetimeFigureOut">
-              <a:rPr lang="en-US" dirty="0"/>
-              <a:t>8/1/2024</a:t>
+              <a:rPr lang="en-US" smtClean="0"/>
+              <a:t>8/21/2024</a:t>
             </a:fld>
             <a:endParaRPr lang="en-US" dirty="0"/>
           </a:p>
@@ -7267,7 +7306,7 @@
           <a:lstStyle/>
           <a:p>
             <a:fld id="{6D22F896-40B5-4ADD-8801-0D06FADFA095}" type="slidenum">
-              <a:rPr lang="en-US" dirty="0"/>
+              <a:rPr lang="en-US" smtClean="0"/>
               <a:t>‹#›</a:t>
             </a:fld>
             <a:endParaRPr lang="en-US" dirty="0"/>
@@ -7275,17 +7314,22 @@
         </p:txBody>
       </p:sp>
     </p:spTree>
+    <p:extLst>
+      <p:ext uri="{BB962C8B-B14F-4D97-AF65-F5344CB8AC3E}">
+        <p14:creationId xmlns:p14="http://schemas.microsoft.com/office/powerpoint/2010/main" val="1911223103"/>
+      </p:ext>
+    </p:extLst>
   </p:cSld>
   <p:clrMapOvr>
     <a:masterClrMapping/>
   </p:clrMapOvr>
-  <mc:AlternateContent xmlns:mc="http://schemas.openxmlformats.org/markup-compatibility/2006">
-    <mc:Choice xmlns:p14="http://schemas.microsoft.com/office/powerpoint/2010/main" Requires="p14">
+  <mc:AlternateContent xmlns:mc="http://schemas.openxmlformats.org/markup-compatibility/2006" xmlns:p14="http://schemas.microsoft.com/office/powerpoint/2010/main">
+    <mc:Choice Requires="p14">
       <p:transition spd="slow" p14:dur="4000">
         <p14:vortex dir="r"/>
       </p:transition>
     </mc:Choice>
-    <mc:Fallback>
+    <mc:Fallback xmlns="">
       <p:transition spd="slow">
         <p:fade/>
       </p:transition>
@@ -7402,8 +7446,8 @@
           <a:lstStyle/>
           <a:p>
             <a:fld id="{48A87A34-81AB-432B-8DAE-1953F412C126}" type="datetimeFigureOut">
-              <a:rPr lang="en-US" dirty="0"/>
-              <a:t>8/1/2024</a:t>
+              <a:rPr lang="en-US" smtClean="0"/>
+              <a:t>8/21/2024</a:t>
             </a:fld>
             <a:endParaRPr lang="en-US" dirty="0"/>
           </a:p>
@@ -7444,7 +7488,7 @@
           <a:lstStyle/>
           <a:p>
             <a:fld id="{6D22F896-40B5-4ADD-8801-0D06FADFA095}" type="slidenum">
-              <a:rPr lang="en-US" dirty="0"/>
+              <a:rPr lang="en-US" smtClean="0"/>
               <a:t>‹#›</a:t>
             </a:fld>
             <a:endParaRPr lang="en-US" dirty="0"/>
@@ -7452,17 +7496,22 @@
         </p:txBody>
       </p:sp>
     </p:spTree>
+    <p:extLst>
+      <p:ext uri="{BB962C8B-B14F-4D97-AF65-F5344CB8AC3E}">
+        <p14:creationId xmlns:p14="http://schemas.microsoft.com/office/powerpoint/2010/main" val="396308306"/>
+      </p:ext>
+    </p:extLst>
   </p:cSld>
   <p:clrMapOvr>
     <a:masterClrMapping/>
   </p:clrMapOvr>
-  <mc:AlternateContent xmlns:mc="http://schemas.openxmlformats.org/markup-compatibility/2006">
-    <mc:Choice xmlns:p14="http://schemas.microsoft.com/office/powerpoint/2010/main" Requires="p14">
+  <mc:AlternateContent xmlns:mc="http://schemas.openxmlformats.org/markup-compatibility/2006" xmlns:p14="http://schemas.microsoft.com/office/powerpoint/2010/main">
+    <mc:Choice Requires="p14">
       <p:transition spd="slow" p14:dur="4000">
         <p14:vortex dir="r"/>
       </p:transition>
     </mc:Choice>
-    <mc:Fallback>
+    <mc:Fallback xmlns="">
       <p:transition spd="slow">
         <p:fade/>
       </p:transition>
@@ -7659,8 +7708,8 @@
           <a:lstStyle/>
           <a:p>
             <a:fld id="{48A87A34-81AB-432B-8DAE-1953F412C126}" type="datetimeFigureOut">
-              <a:rPr lang="en-US" dirty="0"/>
-              <a:t>8/1/2024</a:t>
+              <a:rPr lang="en-US" smtClean="0"/>
+              <a:t>8/21/2024</a:t>
             </a:fld>
             <a:endParaRPr lang="en-US" dirty="0"/>
           </a:p>
@@ -7701,7 +7750,7 @@
           <a:lstStyle/>
           <a:p>
             <a:fld id="{6D22F896-40B5-4ADD-8801-0D06FADFA095}" type="slidenum">
-              <a:rPr lang="en-US" dirty="0"/>
+              <a:rPr lang="en-US" smtClean="0"/>
               <a:t>‹#›</a:t>
             </a:fld>
             <a:endParaRPr lang="en-US" dirty="0"/>
@@ -7709,17 +7758,22 @@
         </p:txBody>
       </p:sp>
     </p:spTree>
+    <p:extLst>
+      <p:ext uri="{BB962C8B-B14F-4D97-AF65-F5344CB8AC3E}">
+        <p14:creationId xmlns:p14="http://schemas.microsoft.com/office/powerpoint/2010/main" val="1061276747"/>
+      </p:ext>
+    </p:extLst>
   </p:cSld>
   <p:clrMapOvr>
     <a:masterClrMapping/>
   </p:clrMapOvr>
-  <mc:AlternateContent xmlns:mc="http://schemas.openxmlformats.org/markup-compatibility/2006">
-    <mc:Choice xmlns:p14="http://schemas.microsoft.com/office/powerpoint/2010/main" Requires="p14">
+  <mc:AlternateContent xmlns:mc="http://schemas.openxmlformats.org/markup-compatibility/2006" xmlns:p14="http://schemas.microsoft.com/office/powerpoint/2010/main">
+    <mc:Choice Requires="p14">
       <p:transition spd="slow" p14:dur="4000">
         <p14:vortex dir="r"/>
       </p:transition>
     </mc:Choice>
-    <mc:Fallback>
+    <mc:Fallback xmlns="">
       <p:transition spd="slow">
         <p:fade/>
       </p:transition>
@@ -7898,8 +7952,8 @@
           <a:lstStyle/>
           <a:p>
             <a:fld id="{48A87A34-81AB-432B-8DAE-1953F412C126}" type="datetimeFigureOut">
-              <a:rPr lang="en-US" dirty="0"/>
-              <a:t>8/1/2024</a:t>
+              <a:rPr lang="en-US" smtClean="0"/>
+              <a:t>8/21/2024</a:t>
             </a:fld>
             <a:endParaRPr lang="en-US" dirty="0"/>
           </a:p>
@@ -7940,7 +7994,7 @@
           <a:lstStyle/>
           <a:p>
             <a:fld id="{6D22F896-40B5-4ADD-8801-0D06FADFA095}" type="slidenum">
-              <a:rPr lang="en-US" dirty="0"/>
+              <a:rPr lang="en-US" smtClean="0"/>
               <a:t>‹#›</a:t>
             </a:fld>
             <a:endParaRPr lang="en-US" dirty="0"/>
@@ -7948,17 +8002,22 @@
         </p:txBody>
       </p:sp>
     </p:spTree>
+    <p:extLst>
+      <p:ext uri="{BB962C8B-B14F-4D97-AF65-F5344CB8AC3E}">
+        <p14:creationId xmlns:p14="http://schemas.microsoft.com/office/powerpoint/2010/main" val="2816328364"/>
+      </p:ext>
+    </p:extLst>
   </p:cSld>
   <p:clrMapOvr>
     <a:masterClrMapping/>
   </p:clrMapOvr>
-  <mc:AlternateContent xmlns:mc="http://schemas.openxmlformats.org/markup-compatibility/2006">
-    <mc:Choice xmlns:p14="http://schemas.microsoft.com/office/powerpoint/2010/main" Requires="p14">
+  <mc:AlternateContent xmlns:mc="http://schemas.openxmlformats.org/markup-compatibility/2006" xmlns:p14="http://schemas.microsoft.com/office/powerpoint/2010/main">
+    <mc:Choice Requires="p14">
       <p:transition spd="slow" p14:dur="4000">
         <p14:vortex dir="r"/>
       </p:transition>
     </mc:Choice>
-    <mc:Fallback>
+    <mc:Fallback xmlns="">
       <p:transition spd="slow">
         <p:fade/>
       </p:transition>
@@ -8286,8 +8345,8 @@
           <a:lstStyle/>
           <a:p>
             <a:fld id="{48A87A34-81AB-432B-8DAE-1953F412C126}" type="datetimeFigureOut">
-              <a:rPr lang="en-US" dirty="0"/>
-              <a:t>8/1/2024</a:t>
+              <a:rPr lang="en-US" smtClean="0"/>
+              <a:t>8/21/2024</a:t>
             </a:fld>
             <a:endParaRPr lang="en-US" dirty="0"/>
           </a:p>
@@ -8328,7 +8387,7 @@
           <a:lstStyle/>
           <a:p>
             <a:fld id="{6D22F896-40B5-4ADD-8801-0D06FADFA095}" type="slidenum">
-              <a:rPr lang="en-US" dirty="0"/>
+              <a:rPr lang="en-US" smtClean="0"/>
               <a:t>‹#›</a:t>
             </a:fld>
             <a:endParaRPr lang="en-US" dirty="0"/>
@@ -8336,17 +8395,22 @@
         </p:txBody>
       </p:sp>
     </p:spTree>
+    <p:extLst>
+      <p:ext uri="{BB962C8B-B14F-4D97-AF65-F5344CB8AC3E}">
+        <p14:creationId xmlns:p14="http://schemas.microsoft.com/office/powerpoint/2010/main" val="3471767275"/>
+      </p:ext>
+    </p:extLst>
   </p:cSld>
   <p:clrMapOvr>
     <a:masterClrMapping/>
   </p:clrMapOvr>
-  <mc:AlternateContent xmlns:mc="http://schemas.openxmlformats.org/markup-compatibility/2006">
-    <mc:Choice xmlns:p14="http://schemas.microsoft.com/office/powerpoint/2010/main" Requires="p14">
+  <mc:AlternateContent xmlns:mc="http://schemas.openxmlformats.org/markup-compatibility/2006" xmlns:p14="http://schemas.microsoft.com/office/powerpoint/2010/main">
+    <mc:Choice Requires="p14">
       <p:transition spd="slow" p14:dur="4000">
         <p14:vortex dir="r"/>
       </p:transition>
     </mc:Choice>
-    <mc:Fallback>
+    <mc:Fallback xmlns="">
       <p:transition spd="slow">
         <p:fade/>
       </p:transition>
@@ -8411,8 +8475,8 @@
           <a:lstStyle/>
           <a:p>
             <a:fld id="{48A87A34-81AB-432B-8DAE-1953F412C126}" type="datetimeFigureOut">
-              <a:rPr lang="en-US" dirty="0"/>
-              <a:t>8/1/2024</a:t>
+              <a:rPr lang="en-US" smtClean="0"/>
+              <a:t>8/21/2024</a:t>
             </a:fld>
             <a:endParaRPr lang="en-US" dirty="0"/>
           </a:p>
@@ -8453,7 +8517,7 @@
           <a:lstStyle/>
           <a:p>
             <a:fld id="{6D22F896-40B5-4ADD-8801-0D06FADFA095}" type="slidenum">
-              <a:rPr lang="en-US" dirty="0"/>
+              <a:rPr lang="en-US" smtClean="0"/>
               <a:t>‹#›</a:t>
             </a:fld>
             <a:endParaRPr lang="en-US" dirty="0"/>
@@ -8461,17 +8525,22 @@
         </p:txBody>
       </p:sp>
     </p:spTree>
+    <p:extLst>
+      <p:ext uri="{BB962C8B-B14F-4D97-AF65-F5344CB8AC3E}">
+        <p14:creationId xmlns:p14="http://schemas.microsoft.com/office/powerpoint/2010/main" val="1858361176"/>
+      </p:ext>
+    </p:extLst>
   </p:cSld>
   <p:clrMapOvr>
     <a:masterClrMapping/>
   </p:clrMapOvr>
-  <mc:AlternateContent xmlns:mc="http://schemas.openxmlformats.org/markup-compatibility/2006">
-    <mc:Choice xmlns:p14="http://schemas.microsoft.com/office/powerpoint/2010/main" Requires="p14">
+  <mc:AlternateContent xmlns:mc="http://schemas.openxmlformats.org/markup-compatibility/2006" xmlns:p14="http://schemas.microsoft.com/office/powerpoint/2010/main">
+    <mc:Choice Requires="p14">
       <p:transition spd="slow" p14:dur="4000">
         <p14:vortex dir="r"/>
       </p:transition>
     </mc:Choice>
-    <mc:Fallback>
+    <mc:Fallback xmlns="">
       <p:transition spd="slow">
         <p:fade/>
       </p:transition>
@@ -8513,8 +8582,8 @@
           <a:lstStyle/>
           <a:p>
             <a:fld id="{48A87A34-81AB-432B-8DAE-1953F412C126}" type="datetimeFigureOut">
-              <a:rPr lang="en-US" dirty="0"/>
-              <a:t>8/1/2024</a:t>
+              <a:rPr lang="en-US" smtClean="0"/>
+              <a:t>8/21/2024</a:t>
             </a:fld>
             <a:endParaRPr lang="en-US" dirty="0"/>
           </a:p>
@@ -8555,7 +8624,7 @@
           <a:lstStyle/>
           <a:p>
             <a:fld id="{6D22F896-40B5-4ADD-8801-0D06FADFA095}" type="slidenum">
-              <a:rPr lang="en-US" dirty="0"/>
+              <a:rPr lang="en-US" smtClean="0"/>
               <a:t>‹#›</a:t>
             </a:fld>
             <a:endParaRPr lang="en-US" dirty="0"/>
@@ -8563,17 +8632,22 @@
         </p:txBody>
       </p:sp>
     </p:spTree>
+    <p:extLst>
+      <p:ext uri="{BB962C8B-B14F-4D97-AF65-F5344CB8AC3E}">
+        <p14:creationId xmlns:p14="http://schemas.microsoft.com/office/powerpoint/2010/main" val="298269269"/>
+      </p:ext>
+    </p:extLst>
   </p:cSld>
   <p:clrMapOvr>
     <a:masterClrMapping/>
   </p:clrMapOvr>
-  <mc:AlternateContent xmlns:mc="http://schemas.openxmlformats.org/markup-compatibility/2006">
-    <mc:Choice xmlns:p14="http://schemas.microsoft.com/office/powerpoint/2010/main" Requires="p14">
+  <mc:AlternateContent xmlns:mc="http://schemas.openxmlformats.org/markup-compatibility/2006" xmlns:p14="http://schemas.microsoft.com/office/powerpoint/2010/main">
+    <mc:Choice Requires="p14">
       <p:transition spd="slow" p14:dur="4000">
         <p14:vortex dir="r"/>
       </p:transition>
     </mc:Choice>
-    <mc:Fallback>
+    <mc:Fallback xmlns="">
       <p:transition spd="slow">
         <p:fade/>
       </p:transition>
@@ -8769,8 +8843,8 @@
           <a:lstStyle/>
           <a:p>
             <a:fld id="{48A87A34-81AB-432B-8DAE-1953F412C126}" type="datetimeFigureOut">
-              <a:rPr lang="en-US" dirty="0"/>
-              <a:t>8/1/2024</a:t>
+              <a:rPr lang="en-US" smtClean="0"/>
+              <a:t>8/21/2024</a:t>
             </a:fld>
             <a:endParaRPr lang="en-US" dirty="0"/>
           </a:p>
@@ -8811,7 +8885,7 @@
           <a:lstStyle/>
           <a:p>
             <a:fld id="{6D22F896-40B5-4ADD-8801-0D06FADFA095}" type="slidenum">
-              <a:rPr lang="en-US" dirty="0"/>
+              <a:rPr lang="en-US" smtClean="0"/>
               <a:t>‹#›</a:t>
             </a:fld>
             <a:endParaRPr lang="en-US" dirty="0"/>
@@ -8819,17 +8893,22 @@
         </p:txBody>
       </p:sp>
     </p:spTree>
+    <p:extLst>
+      <p:ext uri="{BB962C8B-B14F-4D97-AF65-F5344CB8AC3E}">
+        <p14:creationId xmlns:p14="http://schemas.microsoft.com/office/powerpoint/2010/main" val="92154186"/>
+      </p:ext>
+    </p:extLst>
   </p:cSld>
   <p:clrMapOvr>
     <a:masterClrMapping/>
   </p:clrMapOvr>
-  <mc:AlternateContent xmlns:mc="http://schemas.openxmlformats.org/markup-compatibility/2006">
-    <mc:Choice xmlns:p14="http://schemas.microsoft.com/office/powerpoint/2010/main" Requires="p14">
+  <mc:AlternateContent xmlns:mc="http://schemas.openxmlformats.org/markup-compatibility/2006" xmlns:p14="http://schemas.microsoft.com/office/powerpoint/2010/main">
+    <mc:Choice Requires="p14">
       <p:transition spd="slow" p14:dur="4000">
         <p14:vortex dir="r"/>
       </p:transition>
     </mc:Choice>
-    <mc:Fallback>
+    <mc:Fallback xmlns="">
       <p:transition spd="slow">
         <p:fade/>
       </p:transition>
@@ -9056,8 +9135,8 @@
           <a:lstStyle/>
           <a:p>
             <a:fld id="{48A87A34-81AB-432B-8DAE-1953F412C126}" type="datetimeFigureOut">
-              <a:rPr lang="en-US" dirty="0"/>
-              <a:t>8/1/2024</a:t>
+              <a:rPr lang="en-US" smtClean="0"/>
+              <a:t>8/21/2024</a:t>
             </a:fld>
             <a:endParaRPr lang="en-US" dirty="0"/>
           </a:p>
@@ -9098,7 +9177,7 @@
           <a:lstStyle/>
           <a:p>
             <a:fld id="{6D22F896-40B5-4ADD-8801-0D06FADFA095}" type="slidenum">
-              <a:rPr lang="en-US" dirty="0"/>
+              <a:rPr lang="en-US" smtClean="0"/>
               <a:t>‹#›</a:t>
             </a:fld>
             <a:endParaRPr lang="en-US" dirty="0"/>
@@ -9106,17 +9185,22 @@
         </p:txBody>
       </p:sp>
     </p:spTree>
+    <p:extLst>
+      <p:ext uri="{BB962C8B-B14F-4D97-AF65-F5344CB8AC3E}">
+        <p14:creationId xmlns:p14="http://schemas.microsoft.com/office/powerpoint/2010/main" val="3443064380"/>
+      </p:ext>
+    </p:extLst>
   </p:cSld>
   <p:clrMapOvr>
     <a:masterClrMapping/>
   </p:clrMapOvr>
-  <mc:AlternateContent xmlns:mc="http://schemas.openxmlformats.org/markup-compatibility/2006">
-    <mc:Choice xmlns:p14="http://schemas.microsoft.com/office/powerpoint/2010/main" Requires="p14">
+  <mc:AlternateContent xmlns:mc="http://schemas.openxmlformats.org/markup-compatibility/2006" xmlns:p14="http://schemas.microsoft.com/office/powerpoint/2010/main">
+    <mc:Choice Requires="p14">
       <p:transition spd="slow" p14:dur="4000">
         <p14:vortex dir="r"/>
       </p:transition>
     </mc:Choice>
-    <mc:Fallback>
+    <mc:Fallback xmlns="">
       <p:transition spd="slow">
         <p:fade/>
       </p:transition>
@@ -9158,13 +9242,6 @@
         <p:blipFill>
           <a:blip r:embed="rId19">
             <a:alphaModFix amt="30000"/>
-            <a:duotone>
-              <a:prstClr val="black"/>
-              <a:schemeClr val="tx2">
-                <a:tint val="45000"/>
-                <a:satMod val="400000"/>
-              </a:schemeClr>
-            </a:duotone>
             <a:extLst>
               <a:ext uri="{28A0092B-C50C-407E-A947-70E740481C1C}">
                 <a14:useLocalDpi xmlns:a14="http://schemas.microsoft.com/office/drawing/2010/main" val="0"/>
@@ -9209,20 +9286,6 @@
             <a:chOff x="-14288" y="0"/>
             <a:chExt cx="12053888" cy="6858001"/>
           </a:xfrm>
-          <a:gradFill flip="none" rotWithShape="1">
-            <a:gsLst>
-              <a:gs pos="0">
-                <a:schemeClr val="tx2"/>
-              </a:gs>
-              <a:gs pos="100000">
-                <a:schemeClr val="tx2">
-                  <a:lumMod val="50000"/>
-                </a:schemeClr>
-              </a:gs>
-            </a:gsLst>
-            <a:lin ang="5400000" scaled="0"/>
-            <a:tileRect/>
-          </a:gradFill>
         </p:grpSpPr>
         <p:grpSp>
           <p:nvGrpSpPr>
@@ -9237,7 +9300,21 @@
               <a:chOff x="-14288" y="0"/>
               <a:chExt cx="1220788" cy="6858001"/>
             </a:xfrm>
-            <a:grpFill/>
+            <a:gradFill flip="none" rotWithShape="1">
+              <a:gsLst>
+                <a:gs pos="0">
+                  <a:schemeClr val="tx2"/>
+                </a:gs>
+                <a:gs pos="100000">
+                  <a:schemeClr val="bg2">
+                    <a:lumMod val="60000"/>
+                    <a:lumOff val="40000"/>
+                  </a:schemeClr>
+                </a:gs>
+              </a:gsLst>
+              <a:lin ang="5400000" scaled="0"/>
+              <a:tileRect/>
+            </a:gradFill>
           </p:grpSpPr>
           <p:sp>
             <p:nvSpPr>
@@ -11226,7 +11303,24 @@
               <a:chOff x="11364912" y="0"/>
               <a:chExt cx="674688" cy="6848476"/>
             </a:xfrm>
-            <a:grpFill/>
+            <a:gradFill flip="none" rotWithShape="1">
+              <a:gsLst>
+                <a:gs pos="0">
+                  <a:schemeClr val="tx2">
+                    <a:alpha val="80000"/>
+                  </a:schemeClr>
+                </a:gs>
+                <a:gs pos="100000">
+                  <a:schemeClr val="bg2">
+                    <a:lumMod val="60000"/>
+                    <a:lumOff val="40000"/>
+                    <a:alpha val="60000"/>
+                  </a:schemeClr>
+                </a:gs>
+              </a:gsLst>
+              <a:lin ang="5400000" scaled="0"/>
+              <a:tileRect/>
+            </a:gradFill>
           </p:grpSpPr>
           <p:sp>
             <p:nvSpPr>
@@ -12130,9 +12224,9 @@
           </a:lstStyle>
           <a:p>
             <a:fld id="{48A87A34-81AB-432B-8DAE-1953F412C126}" type="datetimeFigureOut">
-              <a:rPr lang="en-US" dirty="0"/>
+              <a:rPr lang="en-US" smtClean="0"/>
               <a:pPr/>
-              <a:t>8/1/2024</a:t>
+              <a:t>8/21/2024</a:t>
             </a:fld>
             <a:endParaRPr lang="en-US" dirty="0"/>
           </a:p>
@@ -12209,7 +12303,7 @@
           </a:lstStyle>
           <a:p>
             <a:fld id="{6D22F896-40B5-4ADD-8801-0D06FADFA095}" type="slidenum">
-              <a:rPr lang="en-US" dirty="0"/>
+              <a:rPr lang="en-US" smtClean="0"/>
               <a:pPr/>
               <a:t>‹#›</a:t>
             </a:fld>
@@ -12218,34 +12312,39 @@
         </p:txBody>
       </p:sp>
     </p:spTree>
+    <p:extLst>
+      <p:ext uri="{BB962C8B-B14F-4D97-AF65-F5344CB8AC3E}">
+        <p14:creationId xmlns:p14="http://schemas.microsoft.com/office/powerpoint/2010/main" val="3324060816"/>
+      </p:ext>
+    </p:extLst>
   </p:cSld>
   <p:clrMap bg1="dk1" tx1="lt1" bg2="dk2" tx2="lt2" accent1="accent1" accent2="accent2" accent3="accent3" accent4="accent4" accent5="accent5" accent6="accent6" hlink="hlink" folHlink="folHlink"/>
   <p:sldLayoutIdLst>
-    <p:sldLayoutId id="2147483649" r:id="rId1"/>
-    <p:sldLayoutId id="2147483650" r:id="rId2"/>
-    <p:sldLayoutId id="2147483651" r:id="rId3"/>
-    <p:sldLayoutId id="2147483652" r:id="rId4"/>
-    <p:sldLayoutId id="2147483653" r:id="rId5"/>
-    <p:sldLayoutId id="2147483654" r:id="rId6"/>
-    <p:sldLayoutId id="2147483655" r:id="rId7"/>
-    <p:sldLayoutId id="2147483656" r:id="rId8"/>
-    <p:sldLayoutId id="2147483657" r:id="rId9"/>
-    <p:sldLayoutId id="2147483660" r:id="rId10"/>
-    <p:sldLayoutId id="2147483661" r:id="rId11"/>
-    <p:sldLayoutId id="2147483666" r:id="rId12"/>
-    <p:sldLayoutId id="2147483663" r:id="rId13"/>
-    <p:sldLayoutId id="2147483667" r:id="rId14"/>
-    <p:sldLayoutId id="2147483668" r:id="rId15"/>
-    <p:sldLayoutId id="2147483658" r:id="rId16"/>
-    <p:sldLayoutId id="2147483659" r:id="rId17"/>
+    <p:sldLayoutId id="2147483688" r:id="rId1"/>
+    <p:sldLayoutId id="2147483689" r:id="rId2"/>
+    <p:sldLayoutId id="2147483690" r:id="rId3"/>
+    <p:sldLayoutId id="2147483691" r:id="rId4"/>
+    <p:sldLayoutId id="2147483692" r:id="rId5"/>
+    <p:sldLayoutId id="2147483693" r:id="rId6"/>
+    <p:sldLayoutId id="2147483694" r:id="rId7"/>
+    <p:sldLayoutId id="2147483695" r:id="rId8"/>
+    <p:sldLayoutId id="2147483696" r:id="rId9"/>
+    <p:sldLayoutId id="2147483697" r:id="rId10"/>
+    <p:sldLayoutId id="2147483698" r:id="rId11"/>
+    <p:sldLayoutId id="2147483699" r:id="rId12"/>
+    <p:sldLayoutId id="2147483700" r:id="rId13"/>
+    <p:sldLayoutId id="2147483701" r:id="rId14"/>
+    <p:sldLayoutId id="2147483702" r:id="rId15"/>
+    <p:sldLayoutId id="2147483703" r:id="rId16"/>
+    <p:sldLayoutId id="2147483704" r:id="rId17"/>
   </p:sldLayoutIdLst>
-  <mc:AlternateContent xmlns:mc="http://schemas.openxmlformats.org/markup-compatibility/2006">
-    <mc:Choice xmlns:p14="http://schemas.microsoft.com/office/powerpoint/2010/main" Requires="p14">
+  <mc:AlternateContent xmlns:mc="http://schemas.openxmlformats.org/markup-compatibility/2006" xmlns:p14="http://schemas.microsoft.com/office/powerpoint/2010/main">
+    <mc:Choice Requires="p14">
       <p:transition spd="slow" p14:dur="4000">
         <p14:vortex dir="r"/>
       </p:transition>
     </mc:Choice>
-    <mc:Fallback>
+    <mc:Fallback xmlns="">
       <p:transition spd="slow">
         <p:fade/>
       </p:transition>
@@ -12660,13 +12759,13 @@
   <p:clrMapOvr>
     <a:masterClrMapping/>
   </p:clrMapOvr>
-  <mc:AlternateContent xmlns:mc="http://schemas.openxmlformats.org/markup-compatibility/2006">
-    <mc:Choice xmlns:p14="http://schemas.microsoft.com/office/powerpoint/2010/main" Requires="p14">
+  <mc:AlternateContent xmlns:mc="http://schemas.openxmlformats.org/markup-compatibility/2006" xmlns:p14="http://schemas.microsoft.com/office/powerpoint/2010/main">
+    <mc:Choice Requires="p14">
       <p:transition spd="slow" p14:dur="4000">
         <p14:vortex dir="r"/>
       </p:transition>
     </mc:Choice>
-    <mc:Fallback>
+    <mc:Fallback xmlns="">
       <p:transition spd="slow">
         <p:fade/>
       </p:transition>
@@ -12934,13 +13033,13 @@
   <p:clrMapOvr>
     <a:masterClrMapping/>
   </p:clrMapOvr>
-  <mc:AlternateContent xmlns:mc="http://schemas.openxmlformats.org/markup-compatibility/2006">
-    <mc:Choice xmlns:p14="http://schemas.microsoft.com/office/powerpoint/2010/main" Requires="p14">
+  <mc:AlternateContent xmlns:mc="http://schemas.openxmlformats.org/markup-compatibility/2006" xmlns:p14="http://schemas.microsoft.com/office/powerpoint/2010/main">
+    <mc:Choice Requires="p14">
       <p:transition spd="slow" p14:dur="4000">
         <p14:vortex dir="r"/>
       </p:transition>
     </mc:Choice>
-    <mc:Fallback>
+    <mc:Fallback xmlns="">
       <p:transition spd="slow">
         <p:fade/>
       </p:transition>
@@ -13078,13 +13177,13 @@
   <p:clrMapOvr>
     <a:masterClrMapping/>
   </p:clrMapOvr>
-  <mc:AlternateContent xmlns:mc="http://schemas.openxmlformats.org/markup-compatibility/2006">
-    <mc:Choice xmlns:p14="http://schemas.microsoft.com/office/powerpoint/2010/main" Requires="p14">
+  <mc:AlternateContent xmlns:mc="http://schemas.openxmlformats.org/markup-compatibility/2006" xmlns:p14="http://schemas.microsoft.com/office/powerpoint/2010/main">
+    <mc:Choice Requires="p14">
       <p:transition spd="slow" p14:dur="4000">
         <p14:vortex dir="r"/>
       </p:transition>
     </mc:Choice>
-    <mc:Fallback>
+    <mc:Fallback xmlns="">
       <p:transition spd="slow">
         <p:fade/>
       </p:transition>
@@ -13284,13 +13383,13 @@
   <p:clrMapOvr>
     <a:masterClrMapping/>
   </p:clrMapOvr>
-  <mc:AlternateContent xmlns:mc="http://schemas.openxmlformats.org/markup-compatibility/2006">
-    <mc:Choice xmlns:p14="http://schemas.microsoft.com/office/powerpoint/2010/main" Requires="p14">
+  <mc:AlternateContent xmlns:mc="http://schemas.openxmlformats.org/markup-compatibility/2006" xmlns:p14="http://schemas.microsoft.com/office/powerpoint/2010/main">
+    <mc:Choice Requires="p14">
       <p:transition spd="slow" p14:dur="4000">
         <p14:vortex dir="r"/>
       </p:transition>
     </mc:Choice>
-    <mc:Fallback>
+    <mc:Fallback xmlns="">
       <p:transition spd="slow">
         <p:fade/>
       </p:transition>
@@ -13508,13 +13607,13 @@
   <p:clrMapOvr>
     <a:masterClrMapping/>
   </p:clrMapOvr>
-  <mc:AlternateContent xmlns:mc="http://schemas.openxmlformats.org/markup-compatibility/2006">
-    <mc:Choice xmlns:p14="http://schemas.microsoft.com/office/powerpoint/2010/main" Requires="p14">
+  <mc:AlternateContent xmlns:mc="http://schemas.openxmlformats.org/markup-compatibility/2006" xmlns:p14="http://schemas.microsoft.com/office/powerpoint/2010/main">
+    <mc:Choice Requires="p14">
       <p:transition spd="slow" p14:dur="4000">
         <p14:vortex dir="r"/>
       </p:transition>
     </mc:Choice>
-    <mc:Fallback>
+    <mc:Fallback xmlns="">
       <p:transition spd="slow">
         <p:fade/>
       </p:transition>
@@ -13736,13 +13835,13 @@
   <p:clrMapOvr>
     <a:masterClrMapping/>
   </p:clrMapOvr>
-  <mc:AlternateContent xmlns:mc="http://schemas.openxmlformats.org/markup-compatibility/2006">
-    <mc:Choice xmlns:p14="http://schemas.microsoft.com/office/powerpoint/2010/main" Requires="p14">
+  <mc:AlternateContent xmlns:mc="http://schemas.openxmlformats.org/markup-compatibility/2006" xmlns:p14="http://schemas.microsoft.com/office/powerpoint/2010/main">
+    <mc:Choice Requires="p14">
       <p:transition spd="slow" p14:dur="4000">
         <p14:vortex dir="r"/>
       </p:transition>
     </mc:Choice>
-    <mc:Fallback>
+    <mc:Fallback xmlns="">
       <p:transition spd="slow">
         <p:fade/>
       </p:transition>
@@ -13762,34 +13861,34 @@
         <a:sysClr val="window" lastClr="FFFFFF"/>
       </a:lt1>
       <a:dk2>
-        <a:srgbClr val="8D1E14"/>
+        <a:srgbClr val="134770"/>
       </a:dk2>
       <a:lt2>
-        <a:srgbClr val="FF744E"/>
+        <a:srgbClr val="82FFFF"/>
       </a:lt2>
       <a:accent1>
-        <a:srgbClr val="E9B758"/>
+        <a:srgbClr val="9ACD4C"/>
       </a:accent1>
       <a:accent2>
-        <a:srgbClr val="FE8943"/>
+        <a:srgbClr val="FAA93A"/>
       </a:accent2>
       <a:accent3>
-        <a:srgbClr val="AEA27C"/>
+        <a:srgbClr val="D35940"/>
       </a:accent3>
       <a:accent4>
-        <a:srgbClr val="90B46E"/>
+        <a:srgbClr val="B258D3"/>
       </a:accent4>
       <a:accent5>
-        <a:srgbClr val="71AEC1"/>
+        <a:srgbClr val="63A0CC"/>
       </a:accent5>
       <a:accent6>
-        <a:srgbClr val="C98DE7"/>
+        <a:srgbClr val="8AC4A7"/>
       </a:accent6>
       <a:hlink>
-        <a:srgbClr val="FF7A22"/>
+        <a:srgbClr val="B8FA56"/>
       </a:hlink>
       <a:folHlink>
-        <a:srgbClr val="FDCD86"/>
+        <a:srgbClr val="7AF8CC"/>
       </a:folHlink>
     </a:clrScheme>
     <a:fontScheme name="Circuit">
@@ -13954,7 +14053,7 @@
             <a:gs pos="0">
               <a:schemeClr val="phClr">
                 <a:tint val="98000"/>
-                <a:hueMod val="88000"/>
+                <a:hueMod val="94000"/>
                 <a:satMod val="148000"/>
                 <a:lumMod val="150000"/>
               </a:schemeClr>
@@ -13981,9 +14080,9 @@
               </a:schemeClr>
               <a:schemeClr val="phClr">
                 <a:tint val="98000"/>
-                <a:hueMod val="92000"/>
+                <a:hueMod val="90000"/>
                 <a:satMod val="150000"/>
-                <a:lumMod val="150000"/>
+                <a:lumMod val="160000"/>
               </a:schemeClr>
             </a:duotone>
           </a:blip>
@@ -13996,7 +14095,7 @@
   <a:extraClrSchemeLst/>
   <a:extLst>
     <a:ext uri="{05A4C25C-085E-4340-85A3-A5531E510DB2}">
-      <thm15:themeFamily xmlns:thm15="http://schemas.microsoft.com/office/thememl/2012/main" name="Circuit" id="{0AC2F7E7-15F5-431C-B2A2-456FE929F56C}" vid="{14971C58-AB76-4A2A-B231-5F8CA03CF491}"/>
+      <thm15:themeFamily xmlns:thm15="http://schemas.microsoft.com/office/thememl/2012/main" name="Circuit" id="{0AC2F7E7-15F5-431C-B2A2-456FE929F56C}" vid="{0911B802-464C-4241-8DD9-B60FF88E379F}"/>
     </a:ext>
   </a:extLst>
 </a:theme>

--- a/Track Your Expenses.pptx
+++ b/Track Your Expenses.pptx
@@ -682,13 +682,13 @@
   <p:clrMapOvr>
     <a:masterClrMapping/>
   </p:clrMapOvr>
-  <mc:AlternateContent xmlns:mc="http://schemas.openxmlformats.org/markup-compatibility/2006" xmlns:p14="http://schemas.microsoft.com/office/powerpoint/2010/main">
-    <mc:Choice Requires="p14">
-      <p:transition spd="slow" p14:dur="4000">
-        <p14:vortex dir="r"/>
+  <mc:AlternateContent xmlns:mc="http://schemas.openxmlformats.org/markup-compatibility/2006">
+    <mc:Choice xmlns:p14="http://schemas.microsoft.com/office/powerpoint/2010/main" Requires="p14">
+      <p:transition spd="slow" p14:dur="1250">
+        <p14:flip dir="r"/>
       </p:transition>
     </mc:Choice>
-    <mc:Fallback xmlns="">
+    <mc:Fallback>
       <p:transition spd="slow">
         <p:fade/>
       </p:transition>
@@ -987,6 +987,18 @@
   <p:clrMapOvr>
     <a:masterClrMapping/>
   </p:clrMapOvr>
+  <mc:AlternateContent xmlns:mc="http://schemas.openxmlformats.org/markup-compatibility/2006">
+    <mc:Choice xmlns:p14="http://schemas.microsoft.com/office/powerpoint/2010/main" Requires="p14">
+      <p:transition spd="slow" p14:dur="1250">
+        <p14:flip dir="r"/>
+      </p:transition>
+    </mc:Choice>
+    <mc:Fallback>
+      <p:transition spd="slow">
+        <p:fade/>
+      </p:transition>
+    </mc:Fallback>
+  </mc:AlternateContent>
 </p:sldLayout>
 </file>
 
@@ -1237,6 +1249,18 @@
   <p:clrMapOvr>
     <a:masterClrMapping/>
   </p:clrMapOvr>
+  <mc:AlternateContent xmlns:mc="http://schemas.openxmlformats.org/markup-compatibility/2006">
+    <mc:Choice xmlns:p14="http://schemas.microsoft.com/office/powerpoint/2010/main" Requires="p14">
+      <p:transition spd="slow" p14:dur="1250">
+        <p14:flip dir="r"/>
+      </p:transition>
+    </mc:Choice>
+    <mc:Fallback>
+      <p:transition spd="slow">
+        <p:fade/>
+      </p:transition>
+    </mc:Fallback>
+  </mc:AlternateContent>
 </p:sldLayout>
 </file>
 
@@ -1779,6 +1803,18 @@
   <p:clrMapOvr>
     <a:masterClrMapping/>
   </p:clrMapOvr>
+  <mc:AlternateContent xmlns:mc="http://schemas.openxmlformats.org/markup-compatibility/2006">
+    <mc:Choice xmlns:p14="http://schemas.microsoft.com/office/powerpoint/2010/main" Requires="p14">
+      <p:transition spd="slow" p14:dur="1250">
+        <p14:flip dir="r"/>
+      </p:transition>
+    </mc:Choice>
+    <mc:Fallback>
+      <p:transition spd="slow">
+        <p:fade/>
+      </p:transition>
+    </mc:Fallback>
+  </mc:AlternateContent>
 </p:sldLayout>
 </file>
 
@@ -2029,6 +2065,18 @@
   <p:clrMapOvr>
     <a:masterClrMapping/>
   </p:clrMapOvr>
+  <mc:AlternateContent xmlns:mc="http://schemas.openxmlformats.org/markup-compatibility/2006">
+    <mc:Choice xmlns:p14="http://schemas.microsoft.com/office/powerpoint/2010/main" Requires="p14">
+      <p:transition spd="slow" p14:dur="1250">
+        <p14:flip dir="r"/>
+      </p:transition>
+    </mc:Choice>
+    <mc:Fallback>
+      <p:transition spd="slow">
+        <p:fade/>
+      </p:transition>
+    </mc:Fallback>
+  </mc:AlternateContent>
 </p:sldLayout>
 </file>
 
@@ -2563,6 +2611,18 @@
   <p:clrMapOvr>
     <a:masterClrMapping/>
   </p:clrMapOvr>
+  <mc:AlternateContent xmlns:mc="http://schemas.openxmlformats.org/markup-compatibility/2006">
+    <mc:Choice xmlns:p14="http://schemas.microsoft.com/office/powerpoint/2010/main" Requires="p14">
+      <p:transition spd="slow" p14:dur="1250">
+        <p14:flip dir="r"/>
+      </p:transition>
+    </mc:Choice>
+    <mc:Fallback>
+      <p:transition spd="slow">
+        <p:fade/>
+      </p:transition>
+    </mc:Fallback>
+  </mc:AlternateContent>
 </p:sldLayout>
 </file>
 
@@ -2862,6 +2922,18 @@
   <p:clrMapOvr>
     <a:masterClrMapping/>
   </p:clrMapOvr>
+  <mc:AlternateContent xmlns:mc="http://schemas.openxmlformats.org/markup-compatibility/2006">
+    <mc:Choice xmlns:p14="http://schemas.microsoft.com/office/powerpoint/2010/main" Requires="p14">
+      <p:transition spd="slow" p14:dur="1250">
+        <p14:flip dir="r"/>
+      </p:transition>
+    </mc:Choice>
+    <mc:Fallback>
+      <p:transition spd="slow">
+        <p:fade/>
+      </p:transition>
+    </mc:Fallback>
+  </mc:AlternateContent>
 </p:sldLayout>
 </file>
 
@@ -3038,6 +3110,18 @@
   <p:clrMapOvr>
     <a:masterClrMapping/>
   </p:clrMapOvr>
+  <mc:AlternateContent xmlns:mc="http://schemas.openxmlformats.org/markup-compatibility/2006">
+    <mc:Choice xmlns:p14="http://schemas.microsoft.com/office/powerpoint/2010/main" Requires="p14">
+      <p:transition spd="slow" p14:dur="1250">
+        <p14:flip dir="r"/>
+      </p:transition>
+    </mc:Choice>
+    <mc:Fallback>
+      <p:transition spd="slow">
+        <p:fade/>
+      </p:transition>
+    </mc:Fallback>
+  </mc:AlternateContent>
 </p:sldLayout>
 </file>
 
@@ -3220,6 +3304,18 @@
   <p:clrMapOvr>
     <a:masterClrMapping/>
   </p:clrMapOvr>
+  <mc:AlternateContent xmlns:mc="http://schemas.openxmlformats.org/markup-compatibility/2006">
+    <mc:Choice xmlns:p14="http://schemas.microsoft.com/office/powerpoint/2010/main" Requires="p14">
+      <p:transition spd="slow" p14:dur="1250">
+        <p14:flip dir="r"/>
+      </p:transition>
+    </mc:Choice>
+    <mc:Fallback>
+      <p:transition spd="slow">
+        <p:fade/>
+      </p:transition>
+    </mc:Fallback>
+  </mc:AlternateContent>
 </p:sldLayout>
 </file>
 
@@ -3397,6 +3493,18 @@
   <p:clrMapOvr>
     <a:masterClrMapping/>
   </p:clrMapOvr>
+  <mc:AlternateContent xmlns:mc="http://schemas.openxmlformats.org/markup-compatibility/2006">
+    <mc:Choice xmlns:p14="http://schemas.microsoft.com/office/powerpoint/2010/main" Requires="p14">
+      <p:transition spd="slow" p14:dur="1250">
+        <p14:flip dir="r"/>
+      </p:transition>
+    </mc:Choice>
+    <mc:Fallback>
+      <p:transition spd="slow">
+        <p:fade/>
+      </p:transition>
+    </mc:Fallback>
+  </mc:AlternateContent>
 </p:sldLayout>
 </file>
 
@@ -3643,13 +3751,13 @@
   <p:clrMapOvr>
     <a:masterClrMapping/>
   </p:clrMapOvr>
-  <mc:AlternateContent xmlns:mc="http://schemas.openxmlformats.org/markup-compatibility/2006" xmlns:p14="http://schemas.microsoft.com/office/powerpoint/2010/main">
-    <mc:Choice Requires="p14">
-      <p:transition spd="slow" p14:dur="4000">
-        <p14:vortex dir="r"/>
+  <mc:AlternateContent xmlns:mc="http://schemas.openxmlformats.org/markup-compatibility/2006">
+    <mc:Choice xmlns:p14="http://schemas.microsoft.com/office/powerpoint/2010/main" Requires="p14">
+      <p:transition spd="slow" p14:dur="1250">
+        <p14:flip dir="r"/>
       </p:transition>
     </mc:Choice>
-    <mc:Fallback xmlns="">
+    <mc:Fallback>
       <p:transition spd="slow">
         <p:fade/>
       </p:transition>
@@ -3954,6 +4062,18 @@
   <p:clrMapOvr>
     <a:masterClrMapping/>
   </p:clrMapOvr>
+  <mc:AlternateContent xmlns:mc="http://schemas.openxmlformats.org/markup-compatibility/2006">
+    <mc:Choice xmlns:p14="http://schemas.microsoft.com/office/powerpoint/2010/main" Requires="p14">
+      <p:transition spd="slow" p14:dur="1250">
+        <p14:flip dir="r"/>
+      </p:transition>
+    </mc:Choice>
+    <mc:Fallback>
+      <p:transition spd="slow">
+        <p:fade/>
+      </p:transition>
+    </mc:Fallback>
+  </mc:AlternateContent>
 </p:sldLayout>
 </file>
 
@@ -4398,6 +4518,18 @@
   <p:clrMapOvr>
     <a:masterClrMapping/>
   </p:clrMapOvr>
+  <mc:AlternateContent xmlns:mc="http://schemas.openxmlformats.org/markup-compatibility/2006">
+    <mc:Choice xmlns:p14="http://schemas.microsoft.com/office/powerpoint/2010/main" Requires="p14">
+      <p:transition spd="slow" p14:dur="1250">
+        <p14:flip dir="r"/>
+      </p:transition>
+    </mc:Choice>
+    <mc:Fallback>
+      <p:transition spd="slow">
+        <p:fade/>
+      </p:transition>
+    </mc:Fallback>
+  </mc:AlternateContent>
 </p:sldLayout>
 </file>
 
@@ -4516,13 +4648,13 @@
   <p:clrMapOvr>
     <a:masterClrMapping/>
   </p:clrMapOvr>
-  <mc:AlternateContent xmlns:mc="http://schemas.openxmlformats.org/markup-compatibility/2006" xmlns:p14="http://schemas.microsoft.com/office/powerpoint/2010/main">
-    <mc:Choice Requires="p14">
-      <p:transition spd="slow" p14:dur="4000">
-        <p14:vortex dir="r"/>
+  <mc:AlternateContent xmlns:mc="http://schemas.openxmlformats.org/markup-compatibility/2006">
+    <mc:Choice xmlns:p14="http://schemas.microsoft.com/office/powerpoint/2010/main" Requires="p14">
+      <p:transition spd="slow" p14:dur="1250">
+        <p14:flip dir="r"/>
       </p:transition>
     </mc:Choice>
-    <mc:Fallback xmlns="">
+    <mc:Fallback>
       <p:transition spd="slow">
         <p:fade/>
       </p:transition>
@@ -4623,13 +4755,13 @@
   <p:clrMapOvr>
     <a:masterClrMapping/>
   </p:clrMapOvr>
-  <mc:AlternateContent xmlns:mc="http://schemas.openxmlformats.org/markup-compatibility/2006" xmlns:p14="http://schemas.microsoft.com/office/powerpoint/2010/main">
-    <mc:Choice Requires="p14">
-      <p:transition spd="slow" p14:dur="4000">
-        <p14:vortex dir="r"/>
+  <mc:AlternateContent xmlns:mc="http://schemas.openxmlformats.org/markup-compatibility/2006">
+    <mc:Choice xmlns:p14="http://schemas.microsoft.com/office/powerpoint/2010/main" Requires="p14">
+      <p:transition spd="slow" p14:dur="1250">
+        <p14:flip dir="r"/>
       </p:transition>
     </mc:Choice>
-    <mc:Fallback xmlns="">
+    <mc:Fallback>
       <p:transition spd="slow">
         <p:fade/>
       </p:transition>
@@ -4920,6 +5052,18 @@
   <p:clrMapOvr>
     <a:masterClrMapping/>
   </p:clrMapOvr>
+  <mc:AlternateContent xmlns:mc="http://schemas.openxmlformats.org/markup-compatibility/2006">
+    <mc:Choice xmlns:p14="http://schemas.microsoft.com/office/powerpoint/2010/main" Requires="p14">
+      <p:transition spd="slow" p14:dur="1250">
+        <p14:flip dir="r"/>
+      </p:transition>
+    </mc:Choice>
+    <mc:Fallback>
+      <p:transition spd="slow">
+        <p:fade/>
+      </p:transition>
+    </mc:Fallback>
+  </mc:AlternateContent>
 </p:sldLayout>
 </file>
 
@@ -5211,13 +5355,13 @@
   <p:clrMapOvr>
     <a:masterClrMapping/>
   </p:clrMapOvr>
-  <mc:AlternateContent xmlns:mc="http://schemas.openxmlformats.org/markup-compatibility/2006" xmlns:p14="http://schemas.microsoft.com/office/powerpoint/2010/main">
-    <mc:Choice Requires="p14">
-      <p:transition spd="slow" p14:dur="4000">
-        <p14:vortex dir="r"/>
+  <mc:AlternateContent xmlns:mc="http://schemas.openxmlformats.org/markup-compatibility/2006">
+    <mc:Choice xmlns:p14="http://schemas.microsoft.com/office/powerpoint/2010/main" Requires="p14">
+      <p:transition spd="slow" p14:dur="1250">
+        <p14:flip dir="r"/>
       </p:transition>
     </mc:Choice>
-    <mc:Fallback xmlns="">
+    <mc:Fallback>
       <p:transition spd="slow">
         <p:fade/>
       </p:transition>
@@ -5808,13 +5952,13 @@
     <p:sldLayoutId id="2147483845" r:id="rId16"/>
     <p:sldLayoutId id="2147483846" r:id="rId17"/>
   </p:sldLayoutIdLst>
-  <mc:AlternateContent xmlns:mc="http://schemas.openxmlformats.org/markup-compatibility/2006" xmlns:p14="http://schemas.microsoft.com/office/powerpoint/2010/main">
-    <mc:Choice Requires="p14">
-      <p:transition spd="slow" p14:dur="4000">
-        <p14:vortex dir="r"/>
+  <mc:AlternateContent xmlns:mc="http://schemas.openxmlformats.org/markup-compatibility/2006">
+    <mc:Choice xmlns:p14="http://schemas.microsoft.com/office/powerpoint/2010/main" Requires="p14">
+      <p:transition spd="slow" p14:dur="1250">
+        <p14:flip dir="r"/>
       </p:transition>
     </mc:Choice>
-    <mc:Fallback xmlns="">
+    <mc:Fallback>
       <p:transition spd="slow">
         <p:fade/>
       </p:transition>
@@ -6340,13 +6484,13 @@
   <p:clrMapOvr>
     <a:masterClrMapping/>
   </p:clrMapOvr>
-  <mc:AlternateContent xmlns:mc="http://schemas.openxmlformats.org/markup-compatibility/2006" xmlns:p14="http://schemas.microsoft.com/office/powerpoint/2010/main">
-    <mc:Choice Requires="p14">
-      <p:transition spd="slow" p14:dur="4000">
-        <p14:vortex dir="r"/>
+  <mc:AlternateContent xmlns:mc="http://schemas.openxmlformats.org/markup-compatibility/2006">
+    <mc:Choice xmlns:p15="http://schemas.microsoft.com/office/powerpoint/2012/main" Requires="p15">
+      <p:transition xmlns:p14="http://schemas.microsoft.com/office/powerpoint/2010/main" spd="slow" p14:dur="2000">
+        <p15:prstTrans prst="curtains"/>
       </p:transition>
     </mc:Choice>
-    <mc:Fallback xmlns="">
+    <mc:Fallback>
       <p:transition spd="slow">
         <p:fade/>
       </p:transition>
@@ -6905,13 +7049,13 @@
   <p:clrMapOvr>
     <a:masterClrMapping/>
   </p:clrMapOvr>
-  <mc:AlternateContent xmlns:mc="http://schemas.openxmlformats.org/markup-compatibility/2006" xmlns:p14="http://schemas.microsoft.com/office/powerpoint/2010/main">
-    <mc:Choice Requires="p14">
-      <p:transition spd="slow" p14:dur="4000">
-        <p14:vortex dir="r"/>
+  <mc:AlternateContent xmlns:mc="http://schemas.openxmlformats.org/markup-compatibility/2006">
+    <mc:Choice xmlns:p14="http://schemas.microsoft.com/office/powerpoint/2010/main" Requires="p14">
+      <p:transition spd="slow" p14:dur="1250">
+        <p14:flip dir="r"/>
       </p:transition>
     </mc:Choice>
-    <mc:Fallback xmlns="">
+    <mc:Fallback>
       <p:transition spd="slow">
         <p:fade/>
       </p:transition>
@@ -7150,13 +7294,13 @@
   <p:clrMapOvr>
     <a:masterClrMapping/>
   </p:clrMapOvr>
-  <mc:AlternateContent xmlns:mc="http://schemas.openxmlformats.org/markup-compatibility/2006" xmlns:p14="http://schemas.microsoft.com/office/powerpoint/2010/main">
-    <mc:Choice Requires="p14">
-      <p:transition spd="slow" p14:dur="4000">
-        <p14:vortex dir="r"/>
+  <mc:AlternateContent xmlns:mc="http://schemas.openxmlformats.org/markup-compatibility/2006">
+    <mc:Choice xmlns:p14="http://schemas.microsoft.com/office/powerpoint/2010/main" Requires="p14">
+      <p:transition spd="slow" p14:dur="1250">
+        <p14:flip dir="r"/>
       </p:transition>
     </mc:Choice>
-    <mc:Fallback xmlns="">
+    <mc:Fallback>
       <p:transition spd="slow">
         <p:fade/>
       </p:transition>
@@ -7219,10 +7363,10 @@
       </p:sp>
       <p:sp>
         <p:nvSpPr>
-          <p:cNvPr id="4" name="Content Placeholder 3">
+          <p:cNvPr id="3" name="Text Placeholder 2">
             <a:extLst>
               <a:ext uri="{FF2B5EF4-FFF2-40B4-BE49-F238E27FC236}">
-                <a16:creationId xmlns:a16="http://schemas.microsoft.com/office/drawing/2014/main" id="{731A1FD7-0E1A-C137-821F-9243265856F1}"/>
+                <a16:creationId xmlns:a16="http://schemas.microsoft.com/office/drawing/2014/main" id="{09BD9893-85B6-8C2E-FB08-23717A638542}"/>
               </a:ext>
             </a:extLst>
           </p:cNvPr>
@@ -7230,122 +7374,155 @@
             <a:spLocks noGrp="1"/>
           </p:cNvSpPr>
           <p:nvPr>
-            <p:ph sz="half" idx="1"/>
+            <p:ph type="body" idx="1"/>
           </p:nvPr>
         </p:nvSpPr>
         <p:spPr>
           <a:xfrm>
-            <a:off x="1141410" y="2249485"/>
-            <a:ext cx="4878389" cy="4399890"/>
+            <a:off x="1577589" y="2385508"/>
+            <a:ext cx="4607188" cy="1503649"/>
           </a:xfrm>
         </p:spPr>
         <p:txBody>
-          <a:bodyPr>
-            <a:normAutofit fontScale="85000" lnSpcReduction="20000"/>
-          </a:bodyPr>
+          <a:bodyPr/>
           <a:lstStyle/>
           <a:p>
             <a:r>
-              <a:rPr lang="it-IT" dirty="0"/>
-              <a:t>Molte app di gestione delle spese offrono un'interfaccia user-friendly, ma alcune possono risultare sovraccariche di opzioni o non ottimizzate per tutti i dispositivi.</a:t>
-            </a:r>
-          </a:p>
-          <a:p>
-            <a:r>
-              <a:rPr lang="it-IT" dirty="0"/>
-              <a:t>Alcune app permettono la categorizzazione delle spese, ma potrebbero non offrire filtri avanzati o personalizzati.</a:t>
-            </a:r>
-          </a:p>
-          <a:p>
-            <a:r>
-              <a:rPr lang="it-IT" dirty="0"/>
-              <a:t>Molte app offrono grafici e report, ma questi possono essere generali o limitati nella personalizzazione.</a:t>
-            </a:r>
-          </a:p>
-          <a:p>
-            <a:r>
-              <a:rPr lang="it-IT" dirty="0"/>
-              <a:t>La sicurezza è una caratteristica comune, ma il livello di protezione dei dati personali può variare.</a:t>
-            </a:r>
-          </a:p>
-          <a:p>
-            <a:r>
-              <a:rPr lang="it-IT" dirty="0"/>
-              <a:t>Alcune app potrebbero richiedere più tempo per l’inserimento delle spese, soprattutto se la procedura è complessa.</a:t>
-            </a:r>
-          </a:p>
-        </p:txBody>
-      </p:sp>
-      <p:sp>
-        <p:nvSpPr>
-          <p:cNvPr id="5" name="Content Placeholder 4">
+              <a:rPr lang="it-IT" sz="2000" dirty="0">
+                <a:solidFill>
+                  <a:schemeClr val="tx1"/>
+                </a:solidFill>
+                <a:latin typeface="Times New Roman" panose="02020603050405020304" pitchFamily="18" charset="0"/>
+                <a:cs typeface="Times New Roman" panose="02020603050405020304" pitchFamily="18" charset="0"/>
+              </a:rPr>
+              <a:t>Il design della nostra app rispetto a quelle sul mercato è molto semplificato cosicché dando una rapida visione si avrà una chiara idea di cosa si può fare nella pagina. </a:t>
+            </a:r>
+          </a:p>
+        </p:txBody>
+      </p:sp>
+      <p:pic>
+        <p:nvPicPr>
+          <p:cNvPr id="11" name="Content Placeholder 10">
             <a:extLst>
               <a:ext uri="{FF2B5EF4-FFF2-40B4-BE49-F238E27FC236}">
-                <a16:creationId xmlns:a16="http://schemas.microsoft.com/office/drawing/2014/main" id="{84C38F0C-215F-5B9D-2ECA-02529999047A}"/>
+                <a16:creationId xmlns:a16="http://schemas.microsoft.com/office/drawing/2014/main" id="{6E45848E-445F-BF6F-F76B-2067D95055D3}"/>
               </a:ext>
             </a:extLst>
           </p:cNvPr>
-          <p:cNvSpPr>
-            <a:spLocks noGrp="1"/>
-          </p:cNvSpPr>
+          <p:cNvPicPr>
+            <a:picLocks noGrp="1" noChangeAspect="1"/>
+          </p:cNvPicPr>
           <p:nvPr>
             <p:ph sz="half" idx="2"/>
           </p:nvPr>
-        </p:nvSpPr>
+        </p:nvPicPr>
+        <p:blipFill>
+          <a:blip r:embed="rId2"/>
+          <a:stretch>
+            <a:fillRect/>
+          </a:stretch>
+        </p:blipFill>
         <p:spPr>
           <a:xfrm>
-            <a:off x="6172200" y="2249486"/>
-            <a:ext cx="4875211" cy="3989996"/>
+            <a:off x="2245584" y="4045256"/>
+            <a:ext cx="2315642" cy="2315642"/>
+          </a:xfrm>
+          <a:prstGeom prst="rect">
+            <a:avLst/>
+          </a:prstGeom>
+          <a:ln>
+            <a:noFill/>
+          </a:ln>
+          <a:effectLst>
+            <a:outerShdw blurRad="292100" dist="139700" dir="2700000" algn="tl" rotWithShape="0">
+              <a:srgbClr val="333333">
+                <a:alpha val="65000"/>
+              </a:srgbClr>
+            </a:outerShdw>
+          </a:effectLst>
+        </p:spPr>
+      </p:pic>
+      <p:sp>
+        <p:nvSpPr>
+          <p:cNvPr id="6" name="Text Placeholder 5">
+            <a:extLst>
+              <a:ext uri="{FF2B5EF4-FFF2-40B4-BE49-F238E27FC236}">
+                <a16:creationId xmlns:a16="http://schemas.microsoft.com/office/drawing/2014/main" id="{6F93DC8D-5EFE-9D8D-8394-39764A4A60EC}"/>
+              </a:ext>
+            </a:extLst>
+          </p:cNvPr>
+          <p:cNvSpPr>
+            <a:spLocks noGrp="1"/>
+          </p:cNvSpPr>
+          <p:nvPr>
+            <p:ph type="body" sz="quarter" idx="3"/>
+          </p:nvPr>
+        </p:nvSpPr>
+        <p:spPr>
+          <a:xfrm>
+            <a:off x="6640639" y="4535796"/>
+            <a:ext cx="4622537" cy="1334563"/>
           </a:xfrm>
         </p:spPr>
         <p:txBody>
-          <a:bodyPr>
-            <a:normAutofit fontScale="85000" lnSpcReduction="20000"/>
-          </a:bodyPr>
+          <a:bodyPr/>
           <a:lstStyle/>
           <a:p>
             <a:r>
-              <a:rPr lang="it-IT" dirty="0"/>
-              <a:t>Il design della nostra app è anche esso user-friendly, ma a nostro parere è pure molto semplificato dando anche con una rapida visione una chiara idea di cosa si può fare nella pagina. Senza sovraccaricare l’utente di informazioni.</a:t>
-            </a:r>
-          </a:p>
-          <a:p>
-            <a:r>
-              <a:rPr lang="it-IT" dirty="0"/>
-              <a:t>La nostra app ha filtri totalmente custom e avanzati, tra essi troviamo le categorie: shopping, food e </a:t>
-            </a:r>
-            <a:r>
-              <a:rPr lang="it-IT" dirty="0" err="1"/>
-              <a:t>pleasure</a:t>
-            </a:r>
-            <a:r>
-              <a:rPr lang="it-IT" dirty="0"/>
-              <a:t>; e ordinamenti per nome, data e prezzo.</a:t>
-            </a:r>
-          </a:p>
-          <a:p>
-            <a:r>
-              <a:rPr lang="it-IT" dirty="0"/>
-              <a:t>Il grafico della nostra app è molto intuitivo per quanto limitante, diamo la possibilità di vedere chiaramente le spese degl’ultimi 3, 6 e 9 mesi.</a:t>
-            </a:r>
-          </a:p>
-          <a:p>
-            <a:r>
-              <a:rPr lang="it-IT" dirty="0"/>
-              <a:t>La sicurezza della nostra app non richiedendo informazioni personali come email, spid o altri dati sensibili, supervisiona a modo la privacy.</a:t>
-            </a:r>
-          </a:p>
-          <a:p>
-            <a:r>
-              <a:rPr lang="it-IT" dirty="0"/>
-              <a:t>L’inserimento delle spese nella nostra app è molto semplice in quanto ci sono chiari campi da compilare con la spiegazione per ognuno di esso.</a:t>
-            </a:r>
-          </a:p>
-          <a:p>
-            <a:endParaRPr lang="it-IT" dirty="0"/>
-          </a:p>
-        </p:txBody>
-      </p:sp>
+              <a:rPr lang="it-IT" sz="2000" dirty="0">
+                <a:solidFill>
+                  <a:schemeClr val="tx1"/>
+                </a:solidFill>
+                <a:latin typeface="Times New Roman" panose="02020603050405020304" pitchFamily="18" charset="0"/>
+                <a:cs typeface="Times New Roman" panose="02020603050405020304" pitchFamily="18" charset="0"/>
+              </a:rPr>
+              <a:t>Il grafico della nostra app è molto intuitivo e a differenza di altre applicazioni, diamo la possibilità di vedere chiaramente le spese degl’ultimi 3, 6 e 9 mesi.</a:t>
+            </a:r>
+          </a:p>
+        </p:txBody>
+      </p:sp>
+      <p:pic>
+        <p:nvPicPr>
+          <p:cNvPr id="13" name="Content Placeholder 12">
+            <a:extLst>
+              <a:ext uri="{FF2B5EF4-FFF2-40B4-BE49-F238E27FC236}">
+                <a16:creationId xmlns:a16="http://schemas.microsoft.com/office/drawing/2014/main" id="{BE5DEB1D-BE81-FFDA-4FC1-39A21D6BC6DC}"/>
+              </a:ext>
+            </a:extLst>
+          </p:cNvPr>
+          <p:cNvPicPr>
+            <a:picLocks noGrp="1" noChangeAspect="1"/>
+          </p:cNvPicPr>
+          <p:nvPr>
+            <p:ph sz="quarter" idx="4"/>
+          </p:nvPr>
+        </p:nvPicPr>
+        <p:blipFill>
+          <a:blip r:embed="rId3"/>
+          <a:stretch>
+            <a:fillRect/>
+          </a:stretch>
+        </p:blipFill>
+        <p:spPr>
+          <a:xfrm>
+            <a:off x="7958780" y="2119605"/>
+            <a:ext cx="1986253" cy="1986253"/>
+          </a:xfrm>
+          <a:prstGeom prst="rect">
+            <a:avLst/>
+          </a:prstGeom>
+          <a:ln>
+            <a:noFill/>
+          </a:ln>
+          <a:effectLst>
+            <a:outerShdw blurRad="292100" dist="139700" dir="2700000" algn="tl" rotWithShape="0">
+              <a:srgbClr val="333333">
+                <a:alpha val="65000"/>
+              </a:srgbClr>
+            </a:outerShdw>
+          </a:effectLst>
+        </p:spPr>
+      </p:pic>
     </p:spTree>
     <p:extLst>
       <p:ext uri="{BB962C8B-B14F-4D97-AF65-F5344CB8AC3E}">
@@ -7356,13 +7533,13 @@
   <p:clrMapOvr>
     <a:masterClrMapping/>
   </p:clrMapOvr>
-  <mc:AlternateContent xmlns:mc="http://schemas.openxmlformats.org/markup-compatibility/2006" xmlns:p14="http://schemas.microsoft.com/office/powerpoint/2010/main">
-    <mc:Choice Requires="p14">
-      <p:transition spd="slow" p14:dur="4000">
-        <p14:vortex dir="r"/>
+  <mc:AlternateContent xmlns:mc="http://schemas.openxmlformats.org/markup-compatibility/2006">
+    <mc:Choice xmlns:p14="http://schemas.microsoft.com/office/powerpoint/2010/main" Requires="p14">
+      <p:transition spd="slow" p14:dur="1250">
+        <p14:flip dir="r"/>
       </p:transition>
     </mc:Choice>
-    <mc:Fallback xmlns="">
+    <mc:Fallback>
       <p:transition spd="slow">
         <p:fade/>
       </p:transition>
@@ -8042,13 +8219,13 @@
   <p:clrMapOvr>
     <a:masterClrMapping/>
   </p:clrMapOvr>
-  <mc:AlternateContent xmlns:mc="http://schemas.openxmlformats.org/markup-compatibility/2006" xmlns:p14="http://schemas.microsoft.com/office/powerpoint/2010/main">
-    <mc:Choice Requires="p14">
-      <p:transition spd="slow" p14:dur="4000">
-        <p14:vortex dir="r"/>
+  <mc:AlternateContent xmlns:mc="http://schemas.openxmlformats.org/markup-compatibility/2006">
+    <mc:Choice xmlns:p14="http://schemas.microsoft.com/office/powerpoint/2010/main" Requires="p14">
+      <p:transition spd="slow" p14:dur="1250">
+        <p14:flip dir="r"/>
       </p:transition>
     </mc:Choice>
-    <mc:Fallback xmlns="">
+    <mc:Fallback>
       <p:transition spd="slow">
         <p:fade/>
       </p:transition>
@@ -8429,13 +8606,13 @@
   <p:clrMapOvr>
     <a:masterClrMapping/>
   </p:clrMapOvr>
-  <mc:AlternateContent xmlns:mc="http://schemas.openxmlformats.org/markup-compatibility/2006" xmlns:p14="http://schemas.microsoft.com/office/powerpoint/2010/main">
-    <mc:Choice Requires="p14">
-      <p:transition spd="slow" p14:dur="4000">
-        <p14:vortex dir="r"/>
+  <mc:AlternateContent xmlns:mc="http://schemas.openxmlformats.org/markup-compatibility/2006">
+    <mc:Choice xmlns:p14="http://schemas.microsoft.com/office/powerpoint/2010/main" Requires="p14">
+      <p:transition spd="slow" p14:dur="1250">
+        <p14:flip dir="r"/>
       </p:transition>
     </mc:Choice>
-    <mc:Fallback xmlns="">
+    <mc:Fallback>
       <p:transition spd="slow">
         <p:fade/>
       </p:transition>
